--- a/final-product/docs/presentation/AMR_Project_Presentation.pptx
+++ b/final-product/docs/presentation/AMR_Project_Presentation.pptx
@@ -124,68 +124,68 @@
   <p:extLst>
     <p:ext uri="{521415D9-36F7-43E2-AB2F-B90AF26B5E84}">
       <p14:sectionLst xmlns:p14="http://schemas.microsoft.com/office/powerpoint/2010/main">
-        <p14:section name="Introduction" id="{798193ec-79df-ba21-6b82-2318e6a20d84}">
+        <p14:section name="Introduction" id="{38dd6429-6969-5af7-43f7-0393048e6a99}">
           <p14:sldIdLst>
             <p14:sldId id="256"/>
             <p14:sldId id="257"/>
           </p14:sldIdLst>
         </p14:section>
-        <p14:section name="Hardware" id="{37d6f46d-a8a5-d899-d887-efe363ac3fad}">
+        <p14:section name="Hardware" id="{83b802e5-a07c-7c08-c372-c0136fbf0bea}">
           <p14:sldIdLst>
             <p14:sldId id="258"/>
           </p14:sldIdLst>
         </p14:section>
-        <p14:section name="Architecture" id="{4c013d89-9a32-a50e-afab-e4fdc0709984}">
+        <p14:section name="Architecture" id="{c13f2c33-4f54-b59a-1277-2e344d09b31b}">
           <p14:sldIdLst>
             <p14:sldId id="259"/>
             <p14:sldId id="260"/>
             <p14:sldId id="261"/>
           </p14:sldIdLst>
         </p14:section>
-        <p14:section name="Communication" id="{bce52926-ec33-65cc-cb07-4ddf5a48e245}">
+        <p14:section name="Communication" id="{63062b23-777b-5800-5fc8-f44bedb23f9e}">
           <p14:sldIdLst>
             <p14:sldId id="262"/>
           </p14:sldIdLst>
         </p14:section>
-        <p14:section name="Embedded control" id="{fb51915e-f755-c5c1-00ce-4f2d8fb3e532}">
+        <p14:section name="Embedded control" id="{f2e8194c-8b59-d225-c00f-18b803def129}">
           <p14:sldIdLst>
             <p14:sldId id="263"/>
             <p14:sldId id="264"/>
             <p14:sldId id="265"/>
           </p14:sldIdLst>
         </p14:section>
-        <p14:section name="Base controller" id="{0f989be0-de6a-0139-1bb0-9a740c83e89b}">
+        <p14:section name="Base controller" id="{2a825e7d-7b9c-ba4f-aa58-245663dea2e6}">
           <p14:sldIdLst>
             <p14:sldId id="266"/>
             <p14:sldId id="267"/>
           </p14:sldIdLst>
         </p14:section>
-        <p14:section name="Mapping" id="{6873699a-fea6-2353-d8c7-46669c560608}">
+        <p14:section name="Mapping" id="{9fb60479-a376-f0bf-c9b3-51341c1f9cc0}">
           <p14:sldIdLst>
             <p14:sldId id="268"/>
           </p14:sldIdLst>
         </p14:section>
-        <p14:section name="Navigation" id="{8a181b91-c68c-f127-85c6-e25b1f913106}">
+        <p14:section name="Navigation" id="{4484b196-9db4-2ace-101f-ec5da0eeb72d}">
           <p14:sldIdLst>
             <p14:sldId id="269"/>
           </p14:sldIdLst>
         </p14:section>
-        <p14:section name="Using the product" id="{e6dba23d-b830-323f-bf66-091a06494638}">
+        <p14:section name="Using the product" id="{1eac7a3e-e870-6ab9-9e1c-adc2fde6650e}">
           <p14:sldIdLst>
             <p14:sldId id="270"/>
           </p14:sldIdLst>
         </p14:section>
-        <p14:section name="Status" id="{1a15cbe6-9df0-2a51-d459-de6be985d862}">
+        <p14:section name="Status" id="{61f09249-a034-6a9e-8157-a49015aecfd3}">
           <p14:sldIdLst>
             <p14:sldId id="271"/>
           </p14:sldIdLst>
         </p14:section>
-        <p14:section name="Resources" id="{376be587-5ed4-b5ff-986e-2f3f35022ab6}">
+        <p14:section name="Resources" id="{1d5022c9-341a-fc28-cc05-f8d1072d9535}">
           <p14:sldIdLst>
             <p14:sldId id="272"/>
           </p14:sldIdLst>
         </p14:section>
-        <p14:section name="Close" id="{2f2f8732-40f6-0f97-1ec0-8892d551068a}">
+        <p14:section name="Close" id="{58fc2afe-bf45-c8cd-f6c1-6f99bd4ba473}">
           <p14:sldIdLst>
             <p14:sldId id="273"/>
           </p14:sldIdLst>
@@ -7095,7 +7095,7 @@
                   <a:schemeClr val="tx1"/>
                 </a:solidFill>
               </a:rPr>
-              <a:t>ME-37 encoder, 7 PPR. 4× decoding = 28 counts per motor revolution, × gear ratio per wheel revolution.</a:t>
+              <a:t>Hall quadrature encoders, 4× decoding in the PCNT hardware. CPR measured with a bench tool: 752.6 (L), 536.1 (R).</a:t>
             </a:r>
             <a:endParaRPr lang="en-US" sz="1400" dirty="0"/>
           </a:p>
@@ -8013,7 +8013,7 @@
                           <a:ea typeface="Calibri" pitchFamily="34" charset="-122"/>
                           <a:cs typeface="Calibri" pitchFamily="34" charset="-120"/>
                         </a:rPr>
-                        <a:t>Pi-synchronized time</a:t>
+                        <a:t>Pi time of encoder read (µs)</a:t>
                       </a:r>
                       <a:endParaRPr lang="en-US" sz="1200" dirty="0">
                         <a:latin typeface="Calibri" charset="0"/>
@@ -13308,7 +13308,7 @@
                   <a:schemeClr val="accent1"/>
                 </a:solidFill>
               </a:rPr>
-              <a:t>Flash the ESP32 first: set Wi-Fi SSID, password and the Pi's IP in amr_esp32.ino.</a:t>
+              <a:t>Flash the ESP32 first: copy secrets.example.h to secrets.h (Wi-Fi + Pi IP), upload amr_esp32_wifi.ino.</a:t>
             </a:r>
             <a:endParaRPr lang="en-US" sz="1300" dirty="0"/>
           </a:p>
@@ -13543,7 +13543,7 @@
                   <a:schemeClr val="tx1"/>
                 </a:solidFill>
               </a:rPr>
-              <a:t>ROS domain mismatch risk (firmware uses domain 0)</a:t>
+              <a:t>Unstable micro-ROS link: 203 sessions in 22 min</a:t>
             </a:r>
             <a:endParaRPr lang="en-US" sz="1400" dirty="0"/>
           </a:p>
@@ -13557,7 +13557,7 @@
                   <a:schemeClr val="tx1"/>
                 </a:solidFill>
               </a:rPr>
-              <a:t>Unstable micro-ROS link: 203 sessions in 22 min</a:t>
+              <a:t>High encoder latency in the same run</a:t>
             </a:r>
             <a:endParaRPr lang="en-US" sz="1400" dirty="0"/>
           </a:p>
@@ -13571,7 +13571,7 @@
                   <a:schemeClr val="tx1"/>
                 </a:solidFill>
               </a:rPr>
-              <a:t>High encoder latency in the same run</a:t>
+              <a:t>Pi needs a static IP (ESP32 connects to a fixed AGENT_IP)</a:t>
             </a:r>
             <a:endParaRPr lang="en-US" sz="1400" dirty="0"/>
           </a:p>
@@ -13889,7 +13889,7 @@
                   <a:schemeClr val="tx1"/>
                 </a:solidFill>
               </a:rPr>
-              <a:t>Network settings stored in ESP32 flash</a:t>
+              <a:t>Test the wired (USB serial) ESP32 firmware</a:t>
             </a:r>
             <a:endParaRPr lang="en-US" sz="1400" dirty="0"/>
           </a:p>
@@ -16096,7 +16096,7 @@
                           <a:ea typeface="Calibri" pitchFamily="34" charset="-122"/>
                           <a:cs typeface="Calibri" pitchFamily="34" charset="-120"/>
                         </a:rPr>
-                        <a:t>ESP32</a:t>
+                        <a:t>ESP32 DevKit (WROOM)</a:t>
                       </a:r>
                       <a:endParaRPr lang="en-US" sz="1200" dirty="0">
                         <a:latin typeface="Calibri" charset="0"/>
@@ -16508,7 +16508,7 @@
                           <a:ea typeface="Calibri" pitchFamily="34" charset="-122"/>
                           <a:cs typeface="Calibri" pitchFamily="34" charset="-120"/>
                         </a:rPr>
-                        <a:t>Right motor</a:t>
+                        <a:t>Motors (×2)</a:t>
                       </a:r>
                       <a:endParaRPr lang="en-US" sz="1200" dirty="0">
                         <a:latin typeface="Calibri" charset="0"/>
@@ -16576,7 +16576,7 @@
                           <a:ea typeface="Calibri" pitchFamily="34" charset="-122"/>
                           <a:cs typeface="Calibri" pitchFamily="34" charset="-120"/>
                         </a:rPr>
-                        <a:t>Drive wheel</a:t>
+                        <a:t>Drive wheels</a:t>
                       </a:r>
                       <a:endParaRPr lang="en-US" sz="1200" dirty="0">
                         <a:latin typeface="Calibri" charset="0"/>
@@ -16644,7 +16644,7 @@
                           <a:ea typeface="Calibri" pitchFamily="34" charset="-122"/>
                           <a:cs typeface="Calibri" pitchFamily="34" charset="-120"/>
                         </a:rPr>
-                        <a:t>PG36M555-19.2K, 12 V, 262 RPM</a:t>
+                        <a:t>Pro-Range 24 V planetary</a:t>
                       </a:r>
                       <a:endParaRPr lang="en-US" sz="1200" dirty="0">
                         <a:latin typeface="Calibri" charset="0"/>
@@ -16714,7 +16714,7 @@
                           <a:ea typeface="Calibri" pitchFamily="34" charset="-122"/>
                           <a:cs typeface="Calibri" pitchFamily="34" charset="-120"/>
                         </a:rPr>
-                        <a:t>Left motor</a:t>
+                        <a:t>Gearboxes</a:t>
                       </a:r>
                       <a:endParaRPr lang="en-US" sz="1200" dirty="0">
                         <a:latin typeface="Calibri" charset="0"/>
@@ -16782,7 +16782,7 @@
                           <a:ea typeface="Calibri" pitchFamily="34" charset="-122"/>
                           <a:cs typeface="Calibri" pitchFamily="34" charset="-120"/>
                         </a:rPr>
-                        <a:t>Drive wheel</a:t>
+                        <a:t>L / R</a:t>
                       </a:r>
                       <a:endParaRPr lang="en-US" sz="1200" dirty="0">
                         <a:latin typeface="Calibri" charset="0"/>
@@ -16850,7 +16850,7 @@
                           <a:ea typeface="Calibri" pitchFamily="34" charset="-122"/>
                           <a:cs typeface="Calibri" pitchFamily="34" charset="-120"/>
                         </a:rPr>
-                        <a:t>26.9:1 gearbox</a:t>
+                        <a:t>≈ 26.9 : 1 / ≈ 19.1 : 1</a:t>
                       </a:r>
                       <a:endParaRPr lang="en-US" sz="1200" dirty="0">
                         <a:latin typeface="Calibri" charset="0"/>
@@ -17056,7 +17056,7 @@
                           <a:ea typeface="Calibri" pitchFamily="34" charset="-122"/>
                           <a:cs typeface="Calibri" pitchFamily="34" charset="-120"/>
                         </a:rPr>
-                        <a:t>ME-37, 7 PPR, 4× decoding</a:t>
+                        <a:t>Hall quadrature, 4× decoding</a:t>
                       </a:r>
                       <a:endParaRPr lang="en-US" sz="1200" dirty="0">
                         <a:latin typeface="Calibri" charset="0"/>
@@ -21899,7 +21899,7 @@
                   <a:schemeClr val="tx1"/>
                 </a:solidFill>
               </a:rPr>
-              <a:t>Time sync at connect: telemetry stamped with Pi time for latency compensation</a:t>
+              <a:t>Clock synced on connect + every 60 s; stamp = Pi time of the encoder read (µs)</a:t>
             </a:r>
             <a:endParaRPr lang="en-US" sz="1500" dirty="0"/>
           </a:p>
